--- a/dist/초6/영어/듣기와읽기/초6_영어_듣기와읽기_02_사건순서파악.pptx
+++ b/dist/초6/영어/듣기와읽기/초6_영어_듣기와읽기_02_사건순서파악.pptx
@@ -120,19 +120,19 @@
   <p:extLst>
     <p:ext uri="{521415D9-36F7-43E2-AB2F-B90AF26B5E84}">
       <p14:sectionLst xmlns:p14="http://schemas.microsoft.com/office/powerpoint/2010/main">
-        <p14:section name="도입" id="{353350e5-49bc-bd23-7502-4be794e6e005}">
+        <p14:section name="도입" id="{d29cd862-3887-ecf9-f633-b1fc75153688}">
           <p14:sldIdLst>
             <p14:sldId id="256"/>
             <p14:sldId id="257"/>
           </p14:sldIdLst>
         </p14:section>
-        <p14:section name="개념" id="{e6719e44-a7c5-9079-bbd9-9c606cd91750}">
+        <p14:section name="개념" id="{27c4d870-c3ab-b874-4bc8-77b9f4f71075}">
           <p14:sldIdLst>
             <p14:sldId id="258"/>
             <p14:sldId id="259"/>
           </p14:sldIdLst>
         </p14:section>
-        <p14:section name="연습" id="{593f6540-b094-dff0-8374-1a3dcf603f18}">
+        <p14:section name="연습" id="{af00d859-4f3e-f2ba-bb96-f8b30fd6c5af}">
           <p14:sldIdLst>
             <p14:sldId id="260"/>
             <p14:sldId id="261"/>
@@ -141,19 +141,19 @@
             <p14:sldId id="264"/>
           </p14:sldIdLst>
         </p14:section>
-        <p14:section name="확인" id="{dcb8dc0d-50eb-e710-1d8e-fbf4e0acaef7}">
+        <p14:section name="확인" id="{810dde39-6c08-12c7-4358-63b5e9105d3e}">
           <p14:sldIdLst>
             <p14:sldId id="265"/>
             <p14:sldId id="266"/>
             <p14:sldId id="267"/>
           </p14:sldIdLst>
         </p14:section>
-        <p14:section name="정리" id="{72b63001-f7bc-3059-64fe-0330c105fbf8}">
+        <p14:section name="정리" id="{7739df9c-f993-06c3-5778-14cd8cc0b537}">
           <p14:sldIdLst>
             <p14:sldId id="268"/>
           </p14:sldIdLst>
         </p14:section>
-        <p14:section name="보충" id="{edd4485b-c8b4-3ec7-dd2a-87c2c1e4d543}">
+        <p14:section name="보충" id="{66aac5d9-9c43-48b4-8fb3-28614e1e0df2}">
           <p14:sldIdLst>
             <p14:sldId id="269"/>
           </p14:sldIdLst>
@@ -4041,7 +4041,7 @@
                 <a:ea typeface="맑은 고딕" pitchFamily="34" charset="-122"/>
                 <a:cs typeface="맑은 고딕" pitchFamily="34" charset="-120"/>
               </a:rPr>
-              <a:t>다 → 라 → 가 → 나</a:t>
+              <a:t>다→라→가→나</a:t>
             </a:r>
             <a:endParaRPr lang="ko-KR" sz="2800" dirty="0"/>
           </a:p>
@@ -4205,7 +4205,7 @@
                 <a:ea typeface="맑은 고딕" pitchFamily="34" charset="-122"/>
                 <a:cs typeface="맑은 고딕" pitchFamily="34" charset="-120"/>
               </a:rPr>
-              <a:t>가 → 나 → 다 → 라</a:t>
+              <a:t>가→나→다→라</a:t>
             </a:r>
             <a:endParaRPr lang="ko-KR" sz="2800" dirty="0"/>
           </a:p>
@@ -4283,7 +4283,7 @@
                 <a:ea typeface="맑은 고딕" pitchFamily="34" charset="-122"/>
                 <a:cs typeface="맑은 고딕" pitchFamily="34" charset="-120"/>
               </a:rPr>
-              <a:t>다 → 가 → 라 → 나</a:t>
+              <a:t>다→가→라→나</a:t>
             </a:r>
             <a:endParaRPr lang="ko-KR" sz="2800" dirty="0"/>
           </a:p>
@@ -6542,12 +6542,12 @@
         </p:nvSpPr>
         <p:spPr>
           <a:xfrm>
-            <a:off x="548640" y="2373376"/>
-            <a:ext cx="2464308" cy="1371600"/>
+            <a:off x="548640" y="2281936"/>
+            <a:ext cx="2464308" cy="1554480"/>
           </a:xfrm>
           <a:prstGeom prst="roundRect">
             <a:avLst>
-              <a:gd name="adj" fmla="val 8000"/>
+              <a:gd name="adj" fmla="val 7059"/>
             </a:avLst>
           </a:prstGeom>
           <a:solidFill>
@@ -6567,7 +6567,7 @@
               <a:buNone/>
             </a:pPr>
             <a:r>
-              <a:rPr lang="en-US" altLang="ko-KR" sz="2200" b="1" dirty="0">
+              <a:rPr lang="en-US" altLang="ko-KR" sz="2600" b="1" dirty="0">
                 <a:solidFill>
                   <a:srgbClr val="1F2937"/>
                 </a:solidFill>
@@ -6577,14 +6577,14 @@
               </a:rPr>
               <a:t>First</a:t>
             </a:r>
-            <a:endParaRPr lang="ko-KR" sz="2200" dirty="0"/>
+            <a:endParaRPr lang="ko-KR" sz="2600" dirty="0"/>
           </a:p>
           <a:p>
             <a:pPr eaLnBrk="0" algn="ctr" indent="0" marL="0">
               <a:buNone/>
             </a:pPr>
             <a:r>
-              <a:rPr lang="ko-KR" altLang="en-US" sz="2200" b="1" dirty="0">
+              <a:rPr lang="ko-KR" altLang="en-US" sz="2600" b="1" dirty="0">
                 <a:solidFill>
                   <a:srgbClr val="1F2937"/>
                 </a:solidFill>
@@ -6594,7 +6594,7 @@
               </a:rPr>
               <a:t>먼저</a:t>
             </a:r>
-            <a:endParaRPr lang="ko-KR" sz="2200" dirty="0"/>
+            <a:endParaRPr lang="ko-KR" sz="2600" dirty="0"/>
           </a:p>
         </p:txBody>
       </p:sp>
@@ -6630,12 +6630,12 @@
         </p:nvSpPr>
         <p:spPr>
           <a:xfrm>
-            <a:off x="3424428" y="2373376"/>
-            <a:ext cx="2464308" cy="1371600"/>
+            <a:off x="3424428" y="2281936"/>
+            <a:ext cx="2464308" cy="1554480"/>
           </a:xfrm>
           <a:prstGeom prst="roundRect">
             <a:avLst>
-              <a:gd name="adj" fmla="val 8000"/>
+              <a:gd name="adj" fmla="val 7059"/>
             </a:avLst>
           </a:prstGeom>
           <a:solidFill>
@@ -6655,7 +6655,7 @@
               <a:buNone/>
             </a:pPr>
             <a:r>
-              <a:rPr lang="en-US" altLang="ko-KR" sz="2200" b="1" dirty="0">
+              <a:rPr lang="en-US" altLang="ko-KR" sz="2600" b="1" dirty="0">
                 <a:solidFill>
                   <a:srgbClr val="1F2937"/>
                 </a:solidFill>
@@ -6665,14 +6665,14 @@
               </a:rPr>
               <a:t>Then</a:t>
             </a:r>
-            <a:endParaRPr lang="ko-KR" sz="2200" dirty="0"/>
+            <a:endParaRPr lang="ko-KR" sz="2600" dirty="0"/>
           </a:p>
           <a:p>
             <a:pPr eaLnBrk="0" algn="ctr" indent="0" marL="0">
               <a:buNone/>
             </a:pPr>
             <a:r>
-              <a:rPr lang="ko-KR" altLang="en-US" sz="2200" b="1" dirty="0">
+              <a:rPr lang="ko-KR" altLang="en-US" sz="2600" b="1" dirty="0">
                 <a:solidFill>
                   <a:srgbClr val="1F2937"/>
                 </a:solidFill>
@@ -6682,7 +6682,7 @@
               </a:rPr>
               <a:t>그다음에</a:t>
             </a:r>
-            <a:endParaRPr lang="ko-KR" sz="2200" dirty="0"/>
+            <a:endParaRPr lang="ko-KR" sz="2600" dirty="0"/>
           </a:p>
         </p:txBody>
       </p:sp>
@@ -6718,12 +6718,12 @@
         </p:nvSpPr>
         <p:spPr>
           <a:xfrm>
-            <a:off x="6300216" y="2373376"/>
-            <a:ext cx="2464308" cy="1371600"/>
+            <a:off x="6300216" y="2281936"/>
+            <a:ext cx="2464308" cy="1554480"/>
           </a:xfrm>
           <a:prstGeom prst="roundRect">
             <a:avLst>
-              <a:gd name="adj" fmla="val 8000"/>
+              <a:gd name="adj" fmla="val 7059"/>
             </a:avLst>
           </a:prstGeom>
           <a:solidFill>
@@ -6743,7 +6743,7 @@
               <a:buNone/>
             </a:pPr>
             <a:r>
-              <a:rPr lang="en-US" altLang="ko-KR" sz="2200" b="1" dirty="0">
+              <a:rPr lang="en-US" altLang="ko-KR" sz="2600" b="1" dirty="0">
                 <a:solidFill>
                   <a:srgbClr val="1F2937"/>
                 </a:solidFill>
@@ -6753,14 +6753,14 @@
               </a:rPr>
               <a:t>Next</a:t>
             </a:r>
-            <a:endParaRPr lang="ko-KR" sz="2200" dirty="0"/>
+            <a:endParaRPr lang="ko-KR" sz="2600" dirty="0"/>
           </a:p>
           <a:p>
             <a:pPr eaLnBrk="0" algn="ctr" indent="0" marL="0">
               <a:buNone/>
             </a:pPr>
             <a:r>
-              <a:rPr lang="ko-KR" altLang="en-US" sz="2200" b="1" dirty="0">
+              <a:rPr lang="ko-KR" altLang="en-US" sz="2600" b="1" dirty="0">
                 <a:solidFill>
                   <a:srgbClr val="1F2937"/>
                 </a:solidFill>
@@ -6770,7 +6770,7 @@
               </a:rPr>
               <a:t>그다음에</a:t>
             </a:r>
-            <a:endParaRPr lang="ko-KR" sz="2200" dirty="0"/>
+            <a:endParaRPr lang="ko-KR" sz="2600" dirty="0"/>
           </a:p>
         </p:txBody>
       </p:sp>
@@ -6806,12 +6806,12 @@
         </p:nvSpPr>
         <p:spPr>
           <a:xfrm>
-            <a:off x="9176004" y="2373376"/>
-            <a:ext cx="2464308" cy="1371600"/>
+            <a:off x="9176004" y="2281936"/>
+            <a:ext cx="2464308" cy="1554480"/>
           </a:xfrm>
           <a:prstGeom prst="roundRect">
             <a:avLst>
-              <a:gd name="adj" fmla="val 8000"/>
+              <a:gd name="adj" fmla="val 7059"/>
             </a:avLst>
           </a:prstGeom>
           <a:solidFill>
@@ -6831,7 +6831,7 @@
               <a:buNone/>
             </a:pPr>
             <a:r>
-              <a:rPr lang="en-US" altLang="ko-KR" sz="2200" b="1" dirty="0">
+              <a:rPr lang="en-US" altLang="ko-KR" sz="2600" b="1" dirty="0">
                 <a:solidFill>
                   <a:srgbClr val="1F2937"/>
                 </a:solidFill>
@@ -6841,14 +6841,14 @@
               </a:rPr>
               <a:t>Finally</a:t>
             </a:r>
-            <a:endParaRPr lang="ko-KR" sz="2200" dirty="0"/>
+            <a:endParaRPr lang="ko-KR" sz="2600" dirty="0"/>
           </a:p>
           <a:p>
             <a:pPr eaLnBrk="0" algn="ctr" indent="0" marL="0">
               <a:buNone/>
             </a:pPr>
             <a:r>
-              <a:rPr lang="ko-KR" altLang="en-US" sz="2200" b="1" dirty="0">
+              <a:rPr lang="ko-KR" altLang="en-US" sz="2600" b="1" dirty="0">
                 <a:solidFill>
                   <a:srgbClr val="1F2937"/>
                 </a:solidFill>
@@ -6858,7 +6858,7 @@
               </a:rPr>
               <a:t>마지막으로</a:t>
             </a:r>
-            <a:endParaRPr lang="ko-KR" sz="2200" dirty="0"/>
+            <a:endParaRPr lang="ko-KR" sz="2600" dirty="0"/>
           </a:p>
         </p:txBody>
       </p:sp>

--- a/dist/초6/영어/듣기와읽기/초6_영어_듣기와읽기_02_사건순서파악.pptx
+++ b/dist/초6/영어/듣기와읽기/초6_영어_듣기와읽기_02_사건순서파악.pptx
@@ -120,19 +120,19 @@
   <p:extLst>
     <p:ext uri="{521415D9-36F7-43E2-AB2F-B90AF26B5E84}">
       <p14:sectionLst xmlns:p14="http://schemas.microsoft.com/office/powerpoint/2010/main">
-        <p14:section name="도입" id="{d29cd862-3887-ecf9-f633-b1fc75153688}">
+        <p14:section name="도입" id="{0b74b4c7-0e51-b489-fdcf-56e3a2ebf57f}">
           <p14:sldIdLst>
             <p14:sldId id="256"/>
             <p14:sldId id="257"/>
           </p14:sldIdLst>
         </p14:section>
-        <p14:section name="개념" id="{27c4d870-c3ab-b874-4bc8-77b9f4f71075}">
+        <p14:section name="개념" id="{99b9daf4-84d8-9e0e-2a12-284bcdb0a4f9}">
           <p14:sldIdLst>
             <p14:sldId id="258"/>
             <p14:sldId id="259"/>
           </p14:sldIdLst>
         </p14:section>
-        <p14:section name="연습" id="{af00d859-4f3e-f2ba-bb96-f8b30fd6c5af}">
+        <p14:section name="연습" id="{7119333c-c91b-8ee7-90bb-91d95a637322}">
           <p14:sldIdLst>
             <p14:sldId id="260"/>
             <p14:sldId id="261"/>
@@ -141,19 +141,19 @@
             <p14:sldId id="264"/>
           </p14:sldIdLst>
         </p14:section>
-        <p14:section name="확인" id="{810dde39-6c08-12c7-4358-63b5e9105d3e}">
+        <p14:section name="확인" id="{455fd399-f35b-0c3a-7775-cd2c85a22ecf}">
           <p14:sldIdLst>
             <p14:sldId id="265"/>
             <p14:sldId id="266"/>
             <p14:sldId id="267"/>
           </p14:sldIdLst>
         </p14:section>
-        <p14:section name="정리" id="{7739df9c-f993-06c3-5778-14cd8cc0b537}">
+        <p14:section name="정리" id="{d9df268d-7099-9bb0-4aa7-93816740e508}">
           <p14:sldIdLst>
             <p14:sldId id="268"/>
           </p14:sldIdLst>
         </p14:section>
-        <p14:section name="보충" id="{66aac5d9-9c43-48b4-8fb3-28614e1e0df2}">
+        <p14:section name="보충" id="{91ab9e7b-d46d-f7df-59d9-b21b9d6b6fca}">
           <p14:sldIdLst>
             <p14:sldId id="269"/>
           </p14:sldIdLst>
